--- a/PAPER/figures/dare_pipeline.pptx
+++ b/PAPER/figures/dare_pipeline.pptx
@@ -3323,35 +3323,6 @@
       </p:sp>
       <p:sp>
         <p:nvSpPr>
-          <p:cNvPr id="66" name="Shape 20"/>
-          <p:cNvSpPr/>
-          <p:nvPr/>
-        </p:nvSpPr>
-        <p:spPr>
-          <a:xfrm>
-            <a:off x="3330720" y="2669760"/>
-            <a:ext cx="137160" cy="576360"/>
-          </a:xfrm>
-          <a:prstGeom prst="line">
-            <a:avLst/>
-          </a:prstGeom>
-          <a:ln w="19050">
-            <a:solidFill>
-              <a:srgbClr val="169b4a"/>
-            </a:solidFill>
-            <a:round/>
-            <a:tailEnd len="med" type="triangle" w="med"/>
-          </a:ln>
-        </p:spPr>
-        <p:style>
-          <a:lnRef idx="0"/>
-          <a:fillRef idx="0"/>
-          <a:effectRef idx="0"/>
-          <a:fontRef idx="minor"/>
-        </p:style>
-      </p:sp>
-      <p:sp>
-        <p:nvSpPr>
           <p:cNvPr id="67" name="Shape 21"/>
           <p:cNvSpPr/>
           <p:nvPr/>
@@ -3430,7 +3401,7 @@
                 <a:latin typeface="Georgia"/>
                 <a:ea typeface="Georgia"/>
               </a:rPr>
-              <a:t>Equalized</a:t>
+              <a:t>Convex-Potential</a:t>
             </a:r>
             <a:endParaRPr b="0" lang="en-US" sz="1400" spc="-1" strike="noStrike">
               <a:latin typeface="Arial"/>
@@ -3454,7 +3425,7 @@
                 <a:latin typeface="Georgia"/>
                 <a:ea typeface="Georgia"/>
               </a:rPr>
-              <a:t>discriminator</a:t>
+              <a:t>Discriminator</a:t>
             </a:r>
             <a:endParaRPr b="0" lang="en-US" sz="1400" spc="-1" strike="noStrike">
               <a:latin typeface="Arial"/>
@@ -3616,97 +3587,6 @@
               <a:xfrm>
                 <a:off x="6194520" y="2193120"/>
                 <a:ext cx="484920" cy="234000"/>
-              </a:xfrm>
-              <a:prstGeom prst="rect">
-                <a:avLst/>
-              </a:prstGeom>
-            </p:spPr>
-            <p:txBody>
-              <a:bodyPr/>
-              <a:p>
-                <a14:m>
-                  <m:oMath xmlns:m="http://schemas.openxmlformats.org/officeDocument/2006/math">
-                    <m:sSub>
-                      <m:e>
-                        <m:r>
-                          <m:t xml:space="preserve">𝑔</m:t>
-                        </m:r>
-                      </m:e>
-                      <m:sub>
-                        <m:r>
-                          <m:t xml:space="preserve">𝜃</m:t>
-                        </m:r>
-                      </m:sub>
-                    </m:sSub>
-                    <m:d>
-                      <m:dPr>
-                        <m:begChr m:val="("/>
-                        <m:endChr m:val=")"/>
-                      </m:dPr>
-                      <m:e>
-                        <m:sSub>
-                          <m:e>
-                            <m:r>
-                              <m:t xml:space="preserve">∆</m:t>
-                            </m:r>
-                          </m:e>
-                          <m:sub>
-                            <m:r>
-                              <m:t xml:space="preserve">𝑡</m:t>
-                            </m:r>
-                          </m:sub>
-                        </m:sSub>
-                      </m:e>
-                    </m:d>
-                  </m:oMath>
-                </a14:m>
-              </a:p>
-            </p:txBody>
-          </p:sp>
-        </mc:Choice>
-        <mc:Fallback/>
-      </mc:AlternateContent>
-      <p:sp>
-        <p:nvSpPr>
-          <p:cNvPr id="74" name="Shape 28"/>
-          <p:cNvSpPr/>
-          <p:nvPr/>
-        </p:nvSpPr>
-        <p:spPr>
-          <a:xfrm flipV="1">
-            <a:off x="9918720" y="2469240"/>
-            <a:ext cx="497160" cy="8280"/>
-          </a:xfrm>
-          <a:prstGeom prst="line">
-            <a:avLst/>
-          </a:prstGeom>
-          <a:ln w="22860">
-            <a:solidFill>
-              <a:srgbClr val="0070c0"/>
-            </a:solidFill>
-            <a:round/>
-            <a:tailEnd len="med" type="triangle" w="med"/>
-          </a:ln>
-        </p:spPr>
-        <p:style>
-          <a:lnRef idx="0"/>
-          <a:fillRef idx="0"/>
-          <a:effectRef idx="0"/>
-          <a:fontRef idx="minor"/>
-        </p:style>
-      </p:sp>
-      <mc:AlternateContent>
-        <mc:Choice xmlns:a14="http://schemas.microsoft.com/office/drawing/2010/main" Requires="a14">
-          <p:sp>
-            <p:nvSpPr>
-              <p:cNvPr id="75" name="Text 29"/>
-              <p:cNvSpPr txBox="1"/>
-              <p:nvPr/>
-            </p:nvSpPr>
-            <p:spPr>
-              <a:xfrm>
-                <a:off x="9901080" y="2244600"/>
-                <a:ext cx="493560" cy="204120"/>
               </a:xfrm>
               <a:prstGeom prst="rect">
                 <a:avLst/>
@@ -3759,6 +3639,97 @@
       </mc:AlternateContent>
       <p:sp>
         <p:nvSpPr>
+          <p:cNvPr id="74" name="Shape 28"/>
+          <p:cNvSpPr/>
+          <p:nvPr/>
+        </p:nvSpPr>
+        <p:spPr>
+          <a:xfrm flipV="1">
+            <a:off x="9918720" y="2469240"/>
+            <a:ext cx="497160" cy="8280"/>
+          </a:xfrm>
+          <a:prstGeom prst="line">
+            <a:avLst/>
+          </a:prstGeom>
+          <a:ln w="22860">
+            <a:solidFill>
+              <a:srgbClr val="0070c0"/>
+            </a:solidFill>
+            <a:round/>
+            <a:tailEnd len="med" type="triangle" w="med"/>
+          </a:ln>
+        </p:spPr>
+        <p:style>
+          <a:lnRef idx="0"/>
+          <a:fillRef idx="0"/>
+          <a:effectRef idx="0"/>
+          <a:fontRef idx="minor"/>
+        </p:style>
+      </p:sp>
+      <mc:AlternateContent>
+        <mc:Choice xmlns:a14="http://schemas.microsoft.com/office/drawing/2010/main" Requires="a14">
+          <p:sp>
+            <p:nvSpPr>
+              <p:cNvPr id="75" name="Text 29"/>
+              <p:cNvSpPr txBox="1"/>
+              <p:nvPr/>
+            </p:nvSpPr>
+            <p:spPr>
+              <a:xfrm>
+                <a:off x="9901080" y="2244600"/>
+                <a:ext cx="493560" cy="204120"/>
+              </a:xfrm>
+              <a:prstGeom prst="rect">
+                <a:avLst/>
+              </a:prstGeom>
+            </p:spPr>
+            <p:txBody>
+              <a:bodyPr/>
+              <a:p>
+                <a14:m>
+                  <m:oMath xmlns:m="http://schemas.openxmlformats.org/officeDocument/2006/math">
+                    <m:sSub>
+                      <m:e>
+                        <m:r>
+                          <m:t xml:space="preserve">𝑧</m:t>
+                        </m:r>
+                      </m:e>
+                      <m:sub>
+                        <m:r>
+                          <m:t xml:space="preserve">𝜃</m:t>
+                        </m:r>
+                      </m:sub>
+                    </m:sSub>
+                    <m:d>
+                      <m:dPr>
+                        <m:begChr m:val="("/>
+                        <m:endChr m:val=")"/>
+                      </m:dPr>
+                      <m:e>
+                        <m:sSub>
+                          <m:e>
+                            <m:r>
+                              <m:t xml:space="preserve">∆</m:t>
+                            </m:r>
+                          </m:e>
+                          <m:sub>
+                            <m:r>
+                              <m:t xml:space="preserve">𝑡</m:t>
+                            </m:r>
+                          </m:sub>
+                        </m:sSub>
+                      </m:e>
+                    </m:d>
+                  </m:oMath>
+                </a14:m>
+              </a:p>
+            </p:txBody>
+          </p:sp>
+        </mc:Choice>
+        <mc:Fallback/>
+      </mc:AlternateContent>
+      <p:sp>
+        <p:nvSpPr>
           <p:cNvPr id="76" name="Shape 30"/>
           <p:cNvSpPr/>
           <p:nvPr/>
@@ -6661,7 +6632,7 @@
                         <m:sSub>
                           <m:e>
                             <m:r>
-                              <m:t xml:space="preserve">𝑓</m:t>
+                              <m:t xml:space="preserve">𝑧</m:t>
                             </m:r>
                           </m:e>
                           <m:sub>
